--- a/Sports-Analytics-Graduate/02_Beyond_Individual_Skills_Lineups_and_Combinations/Lecture_Slides/Module02_Beyond_Individual_Skills_Lineups_and_Combinations.pptx
+++ b/Sports-Analytics-Graduate/02_Beyond_Individual_Skills_Lineups_and_Combinations/Lecture_Slides/Module02_Beyond_Individual_Skills_Lineups_and_Combinations.pptx
@@ -33,7 +33,6 @@
     <p:sldId id="281" r:id="rId27"/>
     <p:sldId id="282" r:id="rId28"/>
     <p:sldId id="283" r:id="rId29"/>
-    <p:sldId id="284" r:id="rId30"/>
     <p:sldId id="285" r:id="rId31"/>
     <p:sldId id="286" r:id="rId32"/>
     <p:sldId id="287" r:id="rId33"/>
@@ -2318,94 +2317,6 @@
             <a:fld id="{F7021451-1387-4CA6-816F-3879F97B5CBC}" type="slidenum">
               <a:rPr lang="en-US"/>
               <a:t>28</a:t>
-            </a:fld>
-            <a:endParaRPr lang="en-US"/>
-          </a:p>
-        </p:txBody>
-      </p:sp>
-    </p:spTree>
-    <p:extLst>
-      <p:ext uri="{BB962C8B-B14F-4D97-AF65-F5344CB8AC3E}">
-        <p14:creationId xmlns:p14="http://schemas.microsoft.com/office/powerpoint/2010/main" val="1024086991"/>
-      </p:ext>
-    </p:extLst>
-  </p:cSld>
-  <p:clrMapOvr>
-    <a:masterClrMapping/>
-  </p:clrMapOvr>
-</p:notes>
-</file>
-
-<file path=ppt/notesSlides/notesSlide29.xml><?xml version="1.0" encoding="utf-8"?>
-<p:notes xmlns:a="http://schemas.openxmlformats.org/drawingml/2006/main" xmlns:r="http://schemas.openxmlformats.org/officeDocument/2006/relationships" xmlns:p="http://schemas.openxmlformats.org/presentationml/2006/main">
-  <p:cSld>
-    <p:spTree>
-      <p:nvGrpSpPr>
-        <p:cNvPr id="1" name=""/>
-        <p:cNvGrpSpPr/>
-        <p:nvPr/>
-      </p:nvGrpSpPr>
-      <p:grpSpPr>
-        <a:xfrm>
-          <a:off x="0" y="0"/>
-          <a:ext cx="0" cy="0"/>
-          <a:chOff x="0" y="0"/>
-          <a:chExt cx="0" cy="0"/>
-        </a:xfrm>
-      </p:grpSpPr>
-      <p:sp>
-        <p:nvSpPr>
-          <p:cNvPr id="2" name="Slide Image Placeholder 1"/>
-          <p:cNvSpPr>
-            <a:spLocks noGrp="1" noRot="1" noChangeAspect="1"/>
-          </p:cNvSpPr>
-          <p:nvPr>
-            <p:ph type="sldImg"/>
-          </p:nvPr>
-        </p:nvSpPr>
-        <p:spPr/>
-      </p:sp>
-      <p:sp>
-        <p:nvSpPr>
-          <p:cNvPr id="3" name="Notes Placeholder 2"/>
-          <p:cNvSpPr>
-            <a:spLocks noGrp="1"/>
-          </p:cNvSpPr>
-          <p:nvPr>
-            <p:ph type="body" idx="1"/>
-          </p:nvPr>
-        </p:nvSpPr>
-        <p:spPr/>
-        <p:txBody>
-          <a:bodyPr/>
-          <a:lstStyle/>
-          <a:p>
-            <a:r>
-              <a:rPr lang="en-US" dirty="0"/>
-              <a:t/>
-            </a:r>
-            <a:endParaRPr lang="en-US" dirty="0"/>
-          </a:p>
-        </p:txBody>
-      </p:sp>
-      <p:sp>
-        <p:nvSpPr>
-          <p:cNvPr id="4" name="Slide Number Placeholder 3"/>
-          <p:cNvSpPr>
-            <a:spLocks noGrp="1"/>
-          </p:cNvSpPr>
-          <p:nvPr>
-            <p:ph type="sldNum" sz="quarter" idx="10"/>
-          </p:nvPr>
-        </p:nvSpPr>
-        <p:spPr/>
-        <p:txBody>
-          <a:bodyPr/>
-          <a:lstStyle/>
-          <a:p>
-            <a:fld id="{F7021451-1387-4CA6-816F-3879F97B5CBC}" type="slidenum">
-              <a:rPr lang="en-US"/>
-              <a:t>29</a:t>
             </a:fld>
             <a:endParaRPr lang="en-US"/>
           </a:p>
@@ -8316,7 +8227,7 @@
                 <a:ea typeface="Calibri" pitchFamily="34" charset="-122"/>
                 <a:cs typeface="Calibri" pitchFamily="34" charset="-120"/>
               </a:rPr>
-              <a:t>You already met the Four Factors in the undergraduate course, applied to a whole team or a whole player. Today the formulas do not change at all, only the unit they are computed on: each of our eight lineups now gets its own Effective Field Goal Percentage, Turnover Ratio, Rebound Percentage, and Free Throw Rate, on offense and on defense.</a:t>
+              <a:t>The Four Factors formulas do not change at all from a whole-team or whole-player analysis, only the unit they are computed on: each of our eight lineups now gets its own Effective Field Goal Percentage, Turnover Ratio, Rebound Percentage, and Free Throw Rate, on offense and on defense.</a:t>
             </a:r>
             <a:endParaRPr lang="en-US" sz="1600" dirty="0"/>
           </a:p>
@@ -9556,7 +9467,7 @@
                 <a:ea typeface="Calibri" pitchFamily="34" charset="-122"/>
                 <a:cs typeface="Calibri" pitchFamily="34" charset="-120"/>
               </a:rPr>
-              <a:t>If the Four Factors feel rusty from the undergraduate course, this is the same refresher, just applied to a five-man unit instead of a full team today.</a:t>
+              <a:t>If the Four Factors formulas feel like a lot to hold in your head, this is the refresher, just applied to a five-man unit instead of a full team today.</a:t>
             </a:r>
             <a:endParaRPr lang="en-US" sz="1400" dirty="0"/>
           </a:p>
@@ -10024,7 +9935,7 @@
                 <a:ea typeface="Calibri" pitchFamily="34" charset="-122"/>
                 <a:cs typeface="Calibri" pitchFamily="34" charset="-120"/>
               </a:rPr>
-              <a:t>Homework Assignment 2 asks you to run this same pipeline on a lineup of your own choosing.</a:t>
+              <a:t>This same pipeline, applied to a lineup of your own choosing, is exactly the kind of task Assignment 1 will ask for once we finish Module 3.</a:t>
             </a:r>
             <a:endParaRPr lang="en-US" sz="1300" dirty="0"/>
           </a:p>
@@ -10235,261 +10146,6 @@
 </p:sld>
 </file>
 
-<file path=ppt/slides/slide29.xml><?xml version="1.0" encoding="utf-8"?>
-<p:sld xmlns:a="http://schemas.openxmlformats.org/drawingml/2006/main" xmlns:r="http://schemas.openxmlformats.org/officeDocument/2006/relationships" xmlns:p="http://schemas.openxmlformats.org/presentationml/2006/main">
-  <p:cSld name="Slide 29">
-    <p:bg>
-      <p:bgPr>
-        <a:solidFill>
-          <a:srgbClr val="FFFFFF"/>
-        </a:solidFill>
-      </p:bgPr>
-    </p:bg>
-    <p:spTree>
-      <p:nvGrpSpPr>
-        <p:cNvPr id="1" name=""/>
-        <p:cNvGrpSpPr/>
-        <p:nvPr/>
-      </p:nvGrpSpPr>
-      <p:grpSpPr>
-        <a:xfrm>
-          <a:off x="0" y="0"/>
-          <a:ext cx="0" cy="0"/>
-          <a:chOff x="0" y="0"/>
-          <a:chExt cx="0" cy="0"/>
-        </a:xfrm>
-      </p:grpSpPr>
-      <p:sp>
-        <p:nvSpPr>
-          <p:cNvPr id="2" name="Text 0"/>
-          <p:cNvSpPr txBox="1"/>
-          <p:nvPr/>
-        </p:nvSpPr>
-        <p:spPr>
-          <a:xfrm>
-            <a:off x="548640" y="411480"/>
-            <a:ext cx="11091672" cy="320040"/>
-          </a:xfrm>
-          <a:prstGeom prst="rect">
-            <a:avLst/>
-          </a:prstGeom>
-          <a:noFill/>
-          <a:ln/>
-        </p:spPr>
-        <p:txBody>
-          <a:bodyPr wrap="square" lIns="0" tIns="0" rIns="0" bIns="0" rtlCol="0" anchor="ctr"/>
-          <a:lstStyle/>
-          <a:p>
-            <a:pPr indent="0" marL="0">
-              <a:buNone/>
-            </a:pPr>
-            <a:r>
-              <a:rPr lang="en-US" sz="1300" b="1" spc="200" kern="0" dirty="0">
-                <a:solidFill>
-                  <a:srgbClr val="E4572E"/>
-                </a:solidFill>
-                <a:latin typeface="Calibri" pitchFamily="34" charset="0"/>
-                <a:ea typeface="Calibri" pitchFamily="34" charset="-122"/>
-                <a:cs typeface="Calibri" pitchFamily="34" charset="-120"/>
-              </a:rPr>
-              <a:t>HOMEWORK ASSIGNMENT 2</a:t>
-            </a:r>
-            <a:endParaRPr lang="en-US" sz="1300" dirty="0"/>
-          </a:p>
-        </p:txBody>
-      </p:sp>
-      <p:sp>
-        <p:nvSpPr>
-          <p:cNvPr id="3" name="Text 1"/>
-          <p:cNvSpPr txBox="1"/>
-          <p:nvPr/>
-        </p:nvSpPr>
-        <p:spPr>
-          <a:xfrm>
-            <a:off x="548640" y="960120"/>
-            <a:ext cx="11091672" cy="914400"/>
-          </a:xfrm>
-          <a:prstGeom prst="rect">
-            <a:avLst/>
-          </a:prstGeom>
-          <a:noFill/>
-          <a:ln/>
-        </p:spPr>
-        <p:txBody>
-          <a:bodyPr wrap="square" lIns="0" tIns="0" rIns="0" bIns="0" rtlCol="0" anchor="ctr"/>
-          <a:lstStyle/>
-          <a:p>
-            <a:pPr indent="0" marL="0">
-              <a:buNone/>
-            </a:pPr>
-            <a:r>
-              <a:rPr lang="en-US" sz="2800" b="1" dirty="0">
-                <a:solidFill>
-                  <a:srgbClr val="16213E"/>
-                </a:solidFill>
-                <a:latin typeface="Cambria" pitchFamily="34" charset="0"/>
-                <a:ea typeface="Cambria" pitchFamily="34" charset="-122"/>
-                <a:cs typeface="Cambria" pitchFamily="34" charset="-120"/>
-              </a:rPr>
-              <a:t>What's In Your Second Assignment</a:t>
-            </a:r>
-            <a:endParaRPr lang="en-US" sz="2800" dirty="0"/>
-          </a:p>
-        </p:txBody>
-      </p:sp>
-      <p:sp>
-        <p:nvSpPr>
-          <p:cNvPr id="4" name="Shape 2"/>
-          <p:cNvSpPr/>
-          <p:nvPr/>
-        </p:nvSpPr>
-        <p:spPr>
-          <a:xfrm>
-            <a:off x="548640" y="1965960"/>
-            <a:ext cx="11091672" cy="1051560"/>
-          </a:xfrm>
-          <a:prstGeom prst="roundRect">
-            <a:avLst>
-              <a:gd name="adj" fmla="val 5217"/>
-            </a:avLst>
-          </a:prstGeom>
-          <a:solidFill>
-            <a:srgbClr val="E4572E"/>
-          </a:solidFill>
-          <a:ln/>
-        </p:spPr>
-      </p:sp>
-      <p:sp>
-        <p:nvSpPr>
-          <p:cNvPr id="5" name="Text 3"/>
-          <p:cNvSpPr txBox="1"/>
-          <p:nvPr/>
-        </p:nvSpPr>
-        <p:spPr>
-          <a:xfrm>
-            <a:off x="822960" y="1965960"/>
-            <a:ext cx="10543032" cy="1051560"/>
-          </a:xfrm>
-          <a:prstGeom prst="rect">
-            <a:avLst/>
-          </a:prstGeom>
-          <a:noFill/>
-          <a:ln/>
-        </p:spPr>
-        <p:txBody>
-          <a:bodyPr wrap="square" lIns="0" tIns="0" rIns="0" bIns="0" rtlCol="0" anchor="ctr"/>
-          <a:lstStyle/>
-          <a:p>
-            <a:pPr indent="0" marL="0">
-              <a:buNone/>
-            </a:pPr>
-            <a:r>
-              <a:rPr lang="en-US" sz="1800" b="1" dirty="0">
-                <a:solidFill>
-                  <a:srgbClr val="FFFFFF"/>
-                </a:solidFill>
-                <a:latin typeface="Calibri" pitchFamily="34" charset="0"/>
-                <a:ea typeface="Calibri" pitchFamily="34" charset="-122"/>
-                <a:cs typeface="Calibri" pitchFamily="34" charset="-120"/>
-              </a:rPr>
-              <a:t>Due: -- set by instructor before posting --</a:t>
-            </a:r>
-            <a:endParaRPr lang="en-US" sz="1800" dirty="0"/>
-          </a:p>
-        </p:txBody>
-      </p:sp>
-      <p:sp>
-        <p:nvSpPr>
-          <p:cNvPr id="6" name="Text 4"/>
-          <p:cNvSpPr txBox="1"/>
-          <p:nvPr/>
-        </p:nvSpPr>
-        <p:spPr>
-          <a:xfrm>
-            <a:off x="548640" y="3291840"/>
-            <a:ext cx="11091672" cy="914400"/>
-          </a:xfrm>
-          <a:prstGeom prst="rect">
-            <a:avLst/>
-          </a:prstGeom>
-          <a:noFill/>
-          <a:ln/>
-        </p:spPr>
-        <p:txBody>
-          <a:bodyPr wrap="square" lIns="0" tIns="0" rIns="0" bIns="0" rtlCol="0" anchor="t"/>
-          <a:lstStyle/>
-          <a:p>
-            <a:pPr indent="0" marL="0">
-              <a:lnSpc>
-                <a:spcPct val="125000"/>
-              </a:lnSpc>
-              <a:buNone/>
-            </a:pPr>
-            <a:r>
-              <a:rPr lang="en-US" sz="1500" dirty="0">
-                <a:solidFill>
-                  <a:srgbClr val="16213E"/>
-                </a:solidFill>
-                <a:latin typeface="Calibri" pitchFamily="34" charset="0"/>
-                <a:ea typeface="Calibri" pitchFamily="34" charset="-122"/>
-                <a:cs typeface="Calibri" pitchFamily="34" charset="-120"/>
-              </a:rPr>
-              <a:t>Five problems, 20 points each: identify your own lineups from a team of your choosing with lineups(), build and interpret a real assist network and shot profile for one of them, extend the Four Factors and Pace/Rating pipeline to your lineups, and connect one finding to how a coach might use it to manage workload across a game.</a:t>
-            </a:r>
-            <a:endParaRPr lang="en-US" sz="1500" dirty="0"/>
-          </a:p>
-        </p:txBody>
-      </p:sp>
-      <p:sp>
-        <p:nvSpPr>
-          <p:cNvPr id="7" name="Text 5"/>
-          <p:cNvSpPr txBox="1"/>
-          <p:nvPr/>
-        </p:nvSpPr>
-        <p:spPr>
-          <a:xfrm>
-            <a:off x="548640" y="6355080"/>
-            <a:ext cx="11091672" cy="365760"/>
-          </a:xfrm>
-          <a:prstGeom prst="rect">
-            <a:avLst/>
-          </a:prstGeom>
-          <a:noFill/>
-          <a:ln/>
-        </p:spPr>
-        <p:txBody>
-          <a:bodyPr wrap="square" lIns="0" tIns="0" rIns="0" bIns="0" rtlCol="0" anchor="ctr"/>
-          <a:lstStyle/>
-          <a:p>
-            <a:pPr indent="0" marL="0">
-              <a:buNone/>
-            </a:pPr>
-            <a:r>
-              <a:rPr lang="en-US" sz="1000" dirty="0">
-                <a:solidFill>
-                  <a:srgbClr val="6B7A99"/>
-                </a:solidFill>
-                <a:latin typeface="Calibri" pitchFamily="34" charset="0"/>
-                <a:ea typeface="Calibri" pitchFamily="34" charset="-122"/>
-                <a:cs typeface="Calibri" pitchFamily="34" charset="-120"/>
-              </a:rPr>
-              <a:t>Full problem set: Homework_Assignment/Module_02_Assignment.md.</a:t>
-            </a:r>
-            <a:endParaRPr lang="en-US" sz="1000" dirty="0"/>
-          </a:p>
-        </p:txBody>
-      </p:sp>
-    </p:spTree>
-  </p:cSld>
-  <p:clrMapOvr>
-    <a:masterClrMapping/>
-  </p:clrMapOvr>
-  <p:transition xmlns:p="http://schemas.openxmlformats.org/presentationml/2006/main" spd="med">
-    <p:fade/>
-  </p:transition>
-</p:sld>
-</file>
-
 <file path=ppt/slides/slide3.xml><?xml version="1.0" encoding="utf-8"?>
 <p:sld xmlns:a="http://schemas.openxmlformats.org/drawingml/2006/main" xmlns:r="http://schemas.openxmlformats.org/officeDocument/2006/relationships" xmlns:p="http://schemas.openxmlformats.org/presentationml/2006/main">
   <p:cSld name="Slide 3">
@@ -11142,7 +10798,7 @@
                 <a:ea typeface="Calibri" pitchFamily="34" charset="-122"/>
                 <a:cs typeface="Calibri" pitchFamily="34" charset="-120"/>
               </a:rPr>
-              <a:t>Homework Assignment 2 and the Module 02 quiz</a:t>
+              <a:t>This module's quiz, and Lab 2</a:t>
             </a:r>
             <a:endParaRPr lang="en-US" sz="1200" dirty="0"/>
           </a:p>
@@ -11995,7 +11651,7 @@
                 <a:ea typeface="Calibri" pitchFamily="34" charset="-122"/>
                 <a:cs typeface="Calibri" pitchFamily="34" charset="-120"/>
               </a:rPr>
-              <a:t>Homework Assignment 2 (see the due date once it's posted).</a:t>
+              <a:t>Practice questions in this module's folder, any time you want extra reps.</a:t>
             </a:r>
             <a:endParaRPr lang="en-US" sz="1600" dirty="0"/>
           </a:p>
